--- a/public/fun/pack/pptx/reviewpro/보장점검양식프리미엄_18_가족점검_아쿠아스틸.pptx
+++ b/public/fun/pack/pptx/reviewpro/보장점검양식프리미엄_18_가족점검_아쿠아스틸.pptx
@@ -112,12 +112,12 @@
   <p:extLst>
     <p:ext uri="{521415D9-36F7-43E2-AB2F-B90AF26B5E84}">
       <p14:sectionLst xmlns:p14="http://schemas.microsoft.com/office/powerpoint/2010/main">
-        <p14:section name="시작" id="{8A99F8CD-9540-4226-B9B5-9CE1FEC99076}">
+        <p14:section name="시작" id="{D696EB1A-31B9-4364-A00F-EC7E3B2F8F81}">
           <p14:sldIdLst>
             <p14:sldId id="256"/>
           </p14:sldIdLst>
         </p14:section>
-        <p14:section name="본문" id="{D1946686-8D1E-479F-9D70-3CBCE79ED5C0}">
+        <p14:section name="본문" id="{9B72C776-8560-4632-84FD-88903699F1A0}">
           <p14:sldIdLst>
             <p14:sldId id="257"/>
             <p14:sldId id="258"/>
@@ -1581,7 +1581,7 @@
             </a:lvl1pPr>
           </a:lstStyle>
           <a:p>
-            <a:fld id="{6720EC3F-F0F0-4BFD-AEC6-3BB403DAC356}" type="slidenum">
+            <a:fld id="{9A041613-65B7-4C6D-8B82-7FBDF435B269}" type="slidenum">
               <a:rPr lang="en-US"/>
               <a:t>‹#›</a:t>
             </a:fld>
@@ -2281,7 +2281,7 @@
             </a:lvl1pPr>
           </a:lstStyle>
           <a:p>
-            <a:fld id="{81B6929D-47AF-4865-9D4B-129E80A2BE7C}" type="slidenum">
+            <a:fld id="{51FEF2D5-F544-41A7-91ED-D7C88E9812F5}" type="slidenum">
               <a:rPr lang="en-US"/>
               <a:t>‹#›</a:t>
             </a:fld>
@@ -2951,7 +2951,7 @@
             </a:lvl1pPr>
           </a:lstStyle>
           <a:p>
-            <a:fld id="{EB18F9A1-0BDF-45FB-830E-68B2A2CCF08E}" type="slidenum">
+            <a:fld id="{FD3CC123-77E4-45DB-B4CE-76004FF250A4}" type="slidenum">
               <a:rPr lang="en-US"/>
               <a:t>‹#›</a:t>
             </a:fld>
@@ -3836,7 +3836,7 @@
           <a:p>
             <a:r>
               <a:rPr lang="ko-KR"/>
-              <a:t>가족 점검 · 0000. 00. 00</a:t>
+              <a:t>가족 점검 · 날짜 입력</a:t>
             </a:r>
           </a:p>
           <a:p>
@@ -3927,7 +3927,7 @@
           <a:bodyPr/>
           <a:lstStyle/>
           <a:p>
-            <a:fld id="{96CDB945-8332-44AC-B7D5-AF496360BB37}" type="slidenum">
+            <a:fld id="{17AC49E5-8011-408A-BEF5-719B3533D3AC}" type="slidenum">
               <a:rPr lang="en-US"/>
               <a:t>‹#›</a:t>
             </a:fld>
@@ -4837,7 +4837,7 @@
           <a:bodyPr/>
           <a:lstStyle/>
           <a:p>
-            <a:fld id="{5B5E0357-C5E5-4976-9DAF-7087B42C10C7}" type="slidenum">
+            <a:fld id="{2199408B-58D1-4E70-914E-076DE8A33399}" type="slidenum">
               <a:rPr lang="en-US"/>
               <a:t>‹#›</a:t>
             </a:fld>
@@ -6343,7 +6343,7 @@
           <a:bodyPr/>
           <a:lstStyle/>
           <a:p>
-            <a:fld id="{FE5C1FB1-858D-42A3-89CC-C44F2BD6EF86}" type="slidenum">
+            <a:fld id="{6AAE66D8-10FF-4156-B48C-F10EB20242E3}" type="slidenum">
               <a:rPr lang="en-US"/>
               <a:t>‹#›</a:t>
             </a:fld>
@@ -7893,7 +7893,7 @@
           <a:bodyPr/>
           <a:lstStyle/>
           <a:p>
-            <a:fld id="{0BDA5A6D-4045-4D5F-A248-13A51770C205}" type="slidenum">
+            <a:fld id="{FD715B4F-352B-473D-8003-1C7DACD239F1}" type="slidenum">
               <a:rPr lang="en-US"/>
               <a:t>‹#›</a:t>
             </a:fld>
@@ -8764,7 +8764,7 @@
           <a:bodyPr/>
           <a:lstStyle/>
           <a:p>
-            <a:fld id="{87C7E61D-F224-4A62-83E1-EC449797AB89}" type="slidenum">
+            <a:fld id="{B46498F2-1513-47E6-B9CE-36DC8FF45C7C}" type="slidenum">
               <a:rPr lang="en-US"/>
               <a:t>‹#›</a:t>
             </a:fld>
